--- a/餐巾纸展开四面相同/单页模板.pptx
+++ b/餐巾纸展开四面相同/单页模板.pptx
@@ -197,7 +197,7 @@
           <a:p>
             <a:fld id="{54400CBD-AB4F-495F-8AB7-7ACBB9CAE89D}" type="datetimeFigureOut">
               <a:rPr lang="zh-CN" altLang="en-US" smtClean="0"/>
-              <a:t>2025/7/24</a:t>
+              <a:t>2025/7/29</a:t>
             </a:fld>
             <a:endParaRPr lang="zh-CN" altLang="en-US"/>
           </a:p>
@@ -590,7 +590,7 @@
           <a:p>
             <a:fld id="{9F1967BA-080F-4186-B318-C2E21DB377F3}" type="datetimeFigureOut">
               <a:rPr lang="zh-CN" altLang="en-US" smtClean="0"/>
-              <a:t>2025/7/24</a:t>
+              <a:t>2025/7/29</a:t>
             </a:fld>
             <a:endParaRPr lang="zh-CN" altLang="en-US"/>
           </a:p>
@@ -755,7 +755,7 @@
           <a:p>
             <a:fld id="{9F1967BA-080F-4186-B318-C2E21DB377F3}" type="datetimeFigureOut">
               <a:rPr lang="zh-CN" altLang="en-US" smtClean="0"/>
-              <a:t>2025/7/24</a:t>
+              <a:t>2025/7/29</a:t>
             </a:fld>
             <a:endParaRPr lang="zh-CN" altLang="en-US"/>
           </a:p>
@@ -930,7 +930,7 @@
           <a:p>
             <a:fld id="{9F1967BA-080F-4186-B318-C2E21DB377F3}" type="datetimeFigureOut">
               <a:rPr lang="zh-CN" altLang="en-US" smtClean="0"/>
-              <a:t>2025/7/24</a:t>
+              <a:t>2025/7/29</a:t>
             </a:fld>
             <a:endParaRPr lang="zh-CN" altLang="en-US"/>
           </a:p>
@@ -1095,7 +1095,7 @@
           <a:p>
             <a:fld id="{9F1967BA-080F-4186-B318-C2E21DB377F3}" type="datetimeFigureOut">
               <a:rPr lang="zh-CN" altLang="en-US" smtClean="0"/>
-              <a:t>2025/7/24</a:t>
+              <a:t>2025/7/29</a:t>
             </a:fld>
             <a:endParaRPr lang="zh-CN" altLang="en-US"/>
           </a:p>
@@ -1334,7 +1334,7 @@
           <a:p>
             <a:fld id="{9F1967BA-080F-4186-B318-C2E21DB377F3}" type="datetimeFigureOut">
               <a:rPr lang="zh-CN" altLang="en-US" smtClean="0"/>
-              <a:t>2025/7/24</a:t>
+              <a:t>2025/7/29</a:t>
             </a:fld>
             <a:endParaRPr lang="zh-CN" altLang="en-US"/>
           </a:p>
@@ -1561,7 +1561,7 @@
           <a:p>
             <a:fld id="{9F1967BA-080F-4186-B318-C2E21DB377F3}" type="datetimeFigureOut">
               <a:rPr lang="zh-CN" altLang="en-US" smtClean="0"/>
-              <a:t>2025/7/24</a:t>
+              <a:t>2025/7/29</a:t>
             </a:fld>
             <a:endParaRPr lang="zh-CN" altLang="en-US"/>
           </a:p>
@@ -1923,7 +1923,7 @@
           <a:p>
             <a:fld id="{9F1967BA-080F-4186-B318-C2E21DB377F3}" type="datetimeFigureOut">
               <a:rPr lang="zh-CN" altLang="en-US" smtClean="0"/>
-              <a:t>2025/7/24</a:t>
+              <a:t>2025/7/29</a:t>
             </a:fld>
             <a:endParaRPr lang="zh-CN" altLang="en-US"/>
           </a:p>
@@ -2036,7 +2036,7 @@
           <a:p>
             <a:fld id="{9F1967BA-080F-4186-B318-C2E21DB377F3}" type="datetimeFigureOut">
               <a:rPr lang="zh-CN" altLang="en-US" smtClean="0"/>
-              <a:t>2025/7/24</a:t>
+              <a:t>2025/7/29</a:t>
             </a:fld>
             <a:endParaRPr lang="zh-CN" altLang="en-US"/>
           </a:p>
@@ -2126,7 +2126,7 @@
           <a:p>
             <a:fld id="{9F1967BA-080F-4186-B318-C2E21DB377F3}" type="datetimeFigureOut">
               <a:rPr lang="zh-CN" altLang="en-US" smtClean="0"/>
-              <a:t>2025/7/24</a:t>
+              <a:t>2025/7/29</a:t>
             </a:fld>
             <a:endParaRPr lang="zh-CN" altLang="en-US"/>
           </a:p>
@@ -2398,7 +2398,7 @@
           <a:p>
             <a:fld id="{9F1967BA-080F-4186-B318-C2E21DB377F3}" type="datetimeFigureOut">
               <a:rPr lang="zh-CN" altLang="en-US" smtClean="0"/>
-              <a:t>2025/7/24</a:t>
+              <a:t>2025/7/29</a:t>
             </a:fld>
             <a:endParaRPr lang="zh-CN" altLang="en-US"/>
           </a:p>
@@ -2650,7 +2650,7 @@
           <a:p>
             <a:fld id="{9F1967BA-080F-4186-B318-C2E21DB377F3}" type="datetimeFigureOut">
               <a:rPr lang="zh-CN" altLang="en-US" smtClean="0"/>
-              <a:t>2025/7/24</a:t>
+              <a:t>2025/7/29</a:t>
             </a:fld>
             <a:endParaRPr lang="zh-CN" altLang="en-US"/>
           </a:p>
@@ -2858,7 +2858,7 @@
           <a:p>
             <a:fld id="{9F1967BA-080F-4186-B318-C2E21DB377F3}" type="datetimeFigureOut">
               <a:rPr lang="zh-CN" altLang="en-US" smtClean="0"/>
-              <a:t>2025/7/24</a:t>
+              <a:t>2025/7/29</a:t>
             </a:fld>
             <a:endParaRPr lang="zh-CN" altLang="en-US"/>
           </a:p>
@@ -3268,6 +3268,78 @@
       </p:grpSpPr>
       <p:pic>
         <p:nvPicPr>
+          <p:cNvPr id="85" name="3">
+            <a:extLst>
+              <a:ext uri="{FF2B5EF4-FFF2-40B4-BE49-F238E27FC236}">
+                <a16:creationId xmlns:a16="http://schemas.microsoft.com/office/drawing/2014/main" id="{9DC966BB-7CB8-4964-A17D-972F659994CE}"/>
+              </a:ext>
+            </a:extLst>
+          </p:cNvPr>
+          <p:cNvPicPr>
+            <a:picLocks noChangeAspect="1"/>
+          </p:cNvPicPr>
+          <p:nvPr/>
+        </p:nvPicPr>
+        <p:blipFill>
+          <a:blip r:embed="rId32" cstate="print">
+            <a:extLst>
+              <a:ext uri="{28A0092B-C50C-407E-A947-70E740481C1C}">
+                <a14:useLocalDpi xmlns:a14="http://schemas.microsoft.com/office/drawing/2010/main" val="0"/>
+              </a:ext>
+            </a:extLst>
+          </a:blip>
+          <a:stretch>
+            <a:fillRect/>
+          </a:stretch>
+        </p:blipFill>
+        <p:spPr>
+          <a:xfrm>
+            <a:off x="5121838" y="3970830"/>
+            <a:ext cx="1807394" cy="1803573"/>
+          </a:xfrm>
+          <a:prstGeom prst="rect">
+            <a:avLst/>
+          </a:prstGeom>
+        </p:spPr>
+      </p:pic>
+      <p:pic>
+        <p:nvPicPr>
+          <p:cNvPr id="70" name="1">
+            <a:extLst>
+              <a:ext uri="{FF2B5EF4-FFF2-40B4-BE49-F238E27FC236}">
+                <a16:creationId xmlns:a16="http://schemas.microsoft.com/office/drawing/2014/main" id="{6F2DA010-44FC-464D-82CE-B05919A9B44D}"/>
+              </a:ext>
+            </a:extLst>
+          </p:cNvPr>
+          <p:cNvPicPr>
+            <a:picLocks noChangeAspect="1"/>
+          </p:cNvPicPr>
+          <p:nvPr/>
+        </p:nvPicPr>
+        <p:blipFill>
+          <a:blip r:embed="rId32" cstate="print">
+            <a:extLst>
+              <a:ext uri="{28A0092B-C50C-407E-A947-70E740481C1C}">
+                <a14:useLocalDpi xmlns:a14="http://schemas.microsoft.com/office/drawing/2010/main" val="0"/>
+              </a:ext>
+            </a:extLst>
+          </a:blip>
+          <a:stretch>
+            <a:fillRect/>
+          </a:stretch>
+        </p:blipFill>
+        <p:spPr>
+          <a:xfrm>
+            <a:off x="5115997" y="1474163"/>
+            <a:ext cx="1807394" cy="1803573"/>
+          </a:xfrm>
+          <a:prstGeom prst="rect">
+            <a:avLst/>
+          </a:prstGeom>
+        </p:spPr>
+      </p:pic>
+      <p:pic>
+        <p:nvPicPr>
           <p:cNvPr id="2" name="2">
             <a:extLst>
               <a:ext uri="{FF2B5EF4-FFF2-40B4-BE49-F238E27FC236}">
@@ -3281,7 +3353,7 @@
           <p:nvPr/>
         </p:nvPicPr>
         <p:blipFill>
-          <a:blip r:embed="rId32">
+          <a:blip r:embed="rId33">
             <a:alphaModFix amt="80000"/>
             <a:extLst>
               <a:ext uri="{28A0092B-C50C-407E-A947-70E740481C1C}">
@@ -4737,7 +4809,7 @@
           <p:nvPr/>
         </p:nvPicPr>
         <p:blipFill>
-          <a:blip r:embed="rId33">
+          <a:blip r:embed="rId34">
             <a:alphaModFix amt="80000"/>
           </a:blip>
           <a:stretch>
@@ -4769,7 +4841,7 @@
           <p:nvPr/>
         </p:nvPicPr>
         <p:blipFill>
-          <a:blip r:embed="rId32">
+          <a:blip r:embed="rId33">
             <a:alphaModFix amt="80000"/>
             <a:extLst>
               <a:ext uri="{28A0092B-C50C-407E-A947-70E740481C1C}">
@@ -4806,7 +4878,7 @@
           <p:nvPr/>
         </p:nvPicPr>
         <p:blipFill>
-          <a:blip r:embed="rId34" cstate="print">
+          <a:blip r:embed="rId35" cstate="print">
             <a:extLst>
               <a:ext uri="{28A0092B-C50C-407E-A947-70E740481C1C}">
                 <a14:useLocalDpi xmlns:a14="http://schemas.microsoft.com/office/drawing/2010/main" val="0"/>
@@ -4887,42 +4959,6 @@
           </a:p>
         </p:txBody>
       </p:sp>
-      <p:pic>
-        <p:nvPicPr>
-          <p:cNvPr id="70" name="1">
-            <a:extLst>
-              <a:ext uri="{FF2B5EF4-FFF2-40B4-BE49-F238E27FC236}">
-                <a16:creationId xmlns:a16="http://schemas.microsoft.com/office/drawing/2014/main" id="{6F2DA010-44FC-464D-82CE-B05919A9B44D}"/>
-              </a:ext>
-            </a:extLst>
-          </p:cNvPr>
-          <p:cNvPicPr>
-            <a:picLocks noChangeAspect="1"/>
-          </p:cNvPicPr>
-          <p:nvPr/>
-        </p:nvPicPr>
-        <p:blipFill>
-          <a:blip r:embed="rId35" cstate="print">
-            <a:extLst>
-              <a:ext uri="{28A0092B-C50C-407E-A947-70E740481C1C}">
-                <a14:useLocalDpi xmlns:a14="http://schemas.microsoft.com/office/drawing/2010/main" val="0"/>
-              </a:ext>
-            </a:extLst>
-          </a:blip>
-          <a:stretch>
-            <a:fillRect/>
-          </a:stretch>
-        </p:blipFill>
-        <p:spPr>
-          <a:xfrm>
-            <a:off x="5115997" y="1474163"/>
-            <a:ext cx="1807394" cy="1803573"/>
-          </a:xfrm>
-          <a:prstGeom prst="rect">
-            <a:avLst/>
-          </a:prstGeom>
-        </p:spPr>
-      </p:pic>
       <p:sp>
         <p:nvSpPr>
           <p:cNvPr id="56" name="文本框 55">
@@ -5466,7 +5502,7 @@
           <p:nvPr/>
         </p:nvPicPr>
         <p:blipFill>
-          <a:blip r:embed="rId33">
+          <a:blip r:embed="rId34">
             <a:alphaModFix amt="80000"/>
           </a:blip>
           <a:stretch>
@@ -5477,42 +5513,6 @@
           <a:xfrm rot="5400000">
             <a:off x="5171267" y="3967671"/>
             <a:ext cx="1800397" cy="1803970"/>
-          </a:xfrm>
-          <a:prstGeom prst="rect">
-            <a:avLst/>
-          </a:prstGeom>
-        </p:spPr>
-      </p:pic>
-      <p:pic>
-        <p:nvPicPr>
-          <p:cNvPr id="85" name="1">
-            <a:extLst>
-              <a:ext uri="{FF2B5EF4-FFF2-40B4-BE49-F238E27FC236}">
-                <a16:creationId xmlns:a16="http://schemas.microsoft.com/office/drawing/2014/main" id="{9DC966BB-7CB8-4964-A17D-972F659994CE}"/>
-              </a:ext>
-            </a:extLst>
-          </p:cNvPr>
-          <p:cNvPicPr>
-            <a:picLocks noChangeAspect="1"/>
-          </p:cNvPicPr>
-          <p:nvPr/>
-        </p:nvPicPr>
-        <p:blipFill>
-          <a:blip r:embed="rId35" cstate="print">
-            <a:extLst>
-              <a:ext uri="{28A0092B-C50C-407E-A947-70E740481C1C}">
-                <a14:useLocalDpi xmlns:a14="http://schemas.microsoft.com/office/drawing/2010/main" val="0"/>
-              </a:ext>
-            </a:extLst>
-          </a:blip>
-          <a:stretch>
-            <a:fillRect/>
-          </a:stretch>
-        </p:blipFill>
-        <p:spPr>
-          <a:xfrm>
-            <a:off x="5121838" y="3970830"/>
-            <a:ext cx="1807394" cy="1803573"/>
           </a:xfrm>
           <a:prstGeom prst="rect">
             <a:avLst/>
